--- a/08-materiais/modelos/conselheiro-de-ia-deck.pptx
+++ b/08-materiais/modelos/conselheiro-de-ia-deck.pptx
@@ -2192,7 +2192,7 @@
                 <a:ea typeface="Calibri" pitchFamily="34" charset="-122"/>
                 <a:cs typeface="Calibri" pitchFamily="34" charset="-120"/>
               </a:rPr>
-              <a:t>ABBA Consultoria de IA · comercial@abbaservices.com.br · abbaservices.com.br</a:t>
+              <a:t>ABBA Consultoria de IA · contato@abbaservices.com.br · abbaservices.com.br</a:t>
             </a:r>
             <a:endParaRPr lang="en-US" sz="1300" dirty="0"/>
           </a:p>

--- a/08-materiais/modelos/conselheiro-de-ia-deck.pptx
+++ b/08-materiais/modelos/conselheiro-de-ia-deck.pptx
@@ -6129,7 +6129,7 @@
                 <a:ea typeface="Calibri" pitchFamily="34" charset="-122"/>
                 <a:cs typeface="Calibri" pitchFamily="34" charset="-120"/>
               </a:rPr>
-              <a:t>A mesma honestidade vale para o histórico: somos uma firma nova — vendemos método e registro, nunca portfólio inventado.</a:t>
+              <a:t>A mesma honestidade vale para o histórico: vendemos método e registro — nunca portfólio inventado.</a:t>
             </a:r>
             <a:endParaRPr lang="en-US" sz="1250" dirty="0"/>
           </a:p>
